--- a/deck/moshe_steps.pptx
+++ b/deck/moshe_steps.pptx
@@ -780,7 +780,7 @@
           <a:p>
             <a:r>
               <a:rPr lang="en-US" dirty="0"/>
-              <a:t>Question six: the paper. It is by El-Haryqy and four colleagues at Ibn Tofail University in Kenitra, Morocco, published in Results in Engineering in April 2025. They describe the layers and the training recipe. They did not publish code or weights; the paper says data are available on request. So the code had to be written from the description.</a:t>
+              <a:t>Question six: the paper. It is by El-Haryqy and four colleagues at Ibn Tofail University in Kenitra, Morocco, published in Results in Engineering in April 2025. The paper describes the layers and the training recipe. The authors put their training code on GitHub only in August 2026, and they have never published trained weights. So we first wrote the code from the description; now we can also run theirs.</a:t>
             </a:r>
             <a:endParaRPr lang="en-US" dirty="0"/>
           </a:p>
@@ -1220,7 +1220,7 @@
           <a:p>
             <a:r>
               <a:rPr lang="en-US" dirty="0"/>
-              <a:t>First, three answers I gave last week were wrong, and I want to correct them. I said the four-signal table came from the same detector as the eleven-signal results. It did not: it came from a separate network, trained only on those four. I said the authors published their weights. They did not publish code or weights; every network here, we trained ourselves. And I agreed there was a piece of code for each modulation. There isn't: there is one network, and a modulation is just an output number.</a:t>
+              <a:t>First, three answers I gave last week were wrong, and I want to correct them. I said the four-signal table came from the same detector as the eleven-signal results. It did not: it came from a separate network, trained only on those four. I said the authors published their weights. They never did. Their training code appeared only in August 2026, and every network here, we trained ourselves. And I agreed there was a piece of code for each modulation. There isn't: there is one network, and a modulation is just an output number.</a:t>
             </a:r>
             <a:endParaRPr lang="en-US" dirty="0"/>
           </a:p>
@@ -4320,6 +4320,20 @@
               <a:buNone/>
             </a:pPr>
             <a:r>
+              <a:rPr lang="en-US" sz="2100" b="1" dirty="0">
+                <a:solidFill>
+                  <a:srgbClr val="1E293B"/>
+                </a:solidFill>
+                <a:latin typeface="Calibri" pitchFamily="34" charset="0"/>
+                <a:ea typeface="Calibri" pitchFamily="34" charset="-122"/>
+                <a:cs typeface="Calibri" pitchFamily="34" charset="-120"/>
+              </a:rPr>
+              <a:t>Apr 2025: </a:t>
+            </a:r>
+            <a:pPr indent="0" marL="0">
+              <a:buNone/>
+            </a:pPr>
+            <a:r>
               <a:rPr lang="en-US" sz="2100" dirty="0">
                 <a:solidFill>
                   <a:srgbClr val="1E293B"/>
@@ -4328,7 +4342,38 @@
                 <a:ea typeface="Calibri" pitchFamily="34" charset="-122"/>
                 <a:cs typeface="Calibri" pitchFamily="34" charset="-120"/>
               </a:rPr>
-              <a:t>the layers (Fig. 2) and the training recipe (Table 2)</a:t>
+              <a:t>the layers and the recipe</a:t>
+            </a:r>
+            <a:endParaRPr lang="en-US" sz="2100" dirty="0"/>
+          </a:p>
+          <a:p>
+            <a:pPr indent="0" marL="0">
+              <a:buNone/>
+            </a:pPr>
+            <a:r>
+              <a:rPr lang="en-US" sz="2100" b="1" dirty="0">
+                <a:solidFill>
+                  <a:srgbClr val="1E293B"/>
+                </a:solidFill>
+                <a:latin typeface="Calibri" pitchFamily="34" charset="0"/>
+                <a:ea typeface="Calibri" pitchFamily="34" charset="-122"/>
+                <a:cs typeface="Calibri" pitchFamily="34" charset="-120"/>
+              </a:rPr>
+              <a:t>Aug 2026: </a:t>
+            </a:r>
+            <a:pPr indent="0" marL="0">
+              <a:buNone/>
+            </a:pPr>
+            <a:r>
+              <a:rPr lang="en-US" sz="2100" dirty="0">
+                <a:solidFill>
+                  <a:srgbClr val="1E293B"/>
+                </a:solidFill>
+                <a:latin typeface="Calibri" pitchFamily="34" charset="0"/>
+                <a:ea typeface="Calibri" pitchFamily="34" charset="-122"/>
+                <a:cs typeface="Calibri" pitchFamily="34" charset="-120"/>
+              </a:rPr>
+              <a:t>their training code (GitHub)</a:t>
             </a:r>
             <a:endParaRPr lang="en-US" sz="2100" dirty="0"/>
           </a:p>
@@ -4367,7 +4412,7 @@
                 <a:ea typeface="Calibri" pitchFamily="34" charset="-122"/>
                 <a:cs typeface="Calibri" pitchFamily="34" charset="-120"/>
               </a:rPr>
-              <a:t>NOT PUBLISHED</a:t>
+              <a:t>NEVER PUBLISHED</a:t>
             </a:r>
             <a:endParaRPr lang="en-US" sz="1500" dirty="0"/>
           </a:p>
@@ -4406,7 +4451,7 @@
                 <a:ea typeface="Calibri" pitchFamily="34" charset="-122"/>
                 <a:cs typeface="Calibri" pitchFamily="34" charset="-120"/>
               </a:rPr>
-              <a:t>code and weights (“available on request”)</a:t>
+              <a:t>the trained weights</a:t>
             </a:r>
             <a:endParaRPr lang="en-US" sz="2100" dirty="0"/>
           </a:p>
@@ -4445,7 +4490,7 @@
                 <a:ea typeface="Calibri" pitchFamily="34" charset="-122"/>
                 <a:cs typeface="Calibri" pitchFamily="34" charset="-120"/>
               </a:rPr>
-              <a:t>So the code had to be written from the description.</a:t>
+              <a:t>We wrote our code from the description; theirs appeared later, and we can now run it.</a:t>
             </a:r>
             <a:endParaRPr lang="en-US" sz="2400" dirty="0"/>
           </a:p>
@@ -7415,7 +7460,7 @@
                 <a:ea typeface="Calibri" pitchFamily="34" charset="-122"/>
                 <a:cs typeface="Calibri" pitchFamily="34" charset="-120"/>
               </a:rPr>
-              <a:t>No code, no weights. We trained every network ourselves.</a:t>
+              <a:t>No weights, ever; their code came in Aug 2026. We trained every network.</a:t>
             </a:r>
             <a:endParaRPr lang="en-US" sz="2000" dirty="0"/>
           </a:p>
